--- a/presentation/Mentorito_Defense.pptx
+++ b/presentation/Mentorito_Defense.pptx
@@ -4216,7 +4216,7 @@
               </a:lnSpc>
             </a:pPr>
             <a:r>
-              <a:rPr lang="fa-IR" sz="1050" b="0">
+              <a:rPr lang="fa-IR" sz="1050" b="0" dirty="0">
                 <a:solidFill>
                   <a:srgbClr val="E4E5FB"/>
                 </a:solidFill>
@@ -24319,7 +24319,7 @@
         </p:nvSpPr>
         <p:spPr>
           <a:xfrm>
-            <a:off x="906627" y="1417320"/>
+            <a:off x="7924647" y="1490472"/>
             <a:ext cx="3246120" cy="2331720"/>
           </a:xfrm>
           <a:prstGeom prst="roundRect">
@@ -24374,7 +24374,7 @@
         </p:nvSpPr>
         <p:spPr>
           <a:xfrm>
-            <a:off x="906627" y="1417320"/>
+            <a:off x="7924647" y="1490472"/>
             <a:ext cx="3246120" cy="128016"/>
           </a:xfrm>
           <a:prstGeom prst="roundRect">
@@ -24421,7 +24421,7 @@
         </p:nvSpPr>
         <p:spPr>
           <a:xfrm>
-            <a:off x="1135227" y="1700784"/>
+            <a:off x="8153247" y="1773936"/>
             <a:ext cx="1097280" cy="502920"/>
           </a:xfrm>
           <a:prstGeom prst="rect">
@@ -24441,7 +24441,7 @@
               </a:lnSpc>
             </a:pPr>
             <a:r>
-              <a:rPr lang="fa-IR" sz="2200" b="1">
+              <a:rPr lang="fa-IR" sz="2200" b="1" dirty="0">
                 <a:solidFill>
                   <a:srgbClr val="4338CA"/>
                 </a:solidFill>
@@ -24462,7 +24462,7 @@
         </p:nvSpPr>
         <p:spPr>
           <a:xfrm>
-            <a:off x="1089507" y="1874519"/>
+            <a:off x="8107527" y="1947671"/>
             <a:ext cx="2880360" cy="822960"/>
           </a:xfrm>
           <a:prstGeom prst="rect">
@@ -24503,7 +24503,7 @@
         </p:nvSpPr>
         <p:spPr>
           <a:xfrm>
-            <a:off x="1089507" y="2743200"/>
+            <a:off x="8107527" y="2816352"/>
             <a:ext cx="2880360" cy="914400"/>
           </a:xfrm>
           <a:prstGeom prst="rect">
@@ -24523,7 +24523,7 @@
               </a:lnSpc>
             </a:pPr>
             <a:r>
-              <a:rPr lang="fa-IR" sz="1200" b="0">
+              <a:rPr lang="fa-IR" sz="1200" b="0" dirty="0">
                 <a:solidFill>
                   <a:srgbClr val="55587A"/>
                 </a:solidFill>
@@ -24544,7 +24544,7 @@
         </p:nvSpPr>
         <p:spPr>
           <a:xfrm>
-            <a:off x="4472787" y="1417320"/>
+            <a:off x="4372203" y="1517904"/>
             <a:ext cx="3246120" cy="2331720"/>
           </a:xfrm>
           <a:prstGeom prst="roundRect">
@@ -24599,7 +24599,7 @@
         </p:nvSpPr>
         <p:spPr>
           <a:xfrm>
-            <a:off x="4472787" y="1417320"/>
+            <a:off x="4372203" y="1517904"/>
             <a:ext cx="3246120" cy="128016"/>
           </a:xfrm>
           <a:prstGeom prst="roundRect">
@@ -24646,7 +24646,7 @@
         </p:nvSpPr>
         <p:spPr>
           <a:xfrm>
-            <a:off x="4701387" y="1700784"/>
+            <a:off x="4600803" y="1801368"/>
             <a:ext cx="1097280" cy="502920"/>
           </a:xfrm>
           <a:prstGeom prst="rect">
@@ -24687,7 +24687,7 @@
         </p:nvSpPr>
         <p:spPr>
           <a:xfrm>
-            <a:off x="4655667" y="1874519"/>
+            <a:off x="4555083" y="1975103"/>
             <a:ext cx="2880360" cy="822960"/>
           </a:xfrm>
           <a:prstGeom prst="rect">
@@ -24707,7 +24707,7 @@
               </a:lnSpc>
             </a:pPr>
             <a:r>
-              <a:rPr lang="fa-IR" sz="1500" b="1">
+              <a:rPr lang="fa-IR" sz="1500" b="1" dirty="0">
                 <a:solidFill>
                   <a:srgbClr val="17172B"/>
                 </a:solidFill>
@@ -24728,7 +24728,7 @@
         </p:nvSpPr>
         <p:spPr>
           <a:xfrm>
-            <a:off x="4655667" y="2743200"/>
+            <a:off x="4555083" y="2843784"/>
             <a:ext cx="2880360" cy="914400"/>
           </a:xfrm>
           <a:prstGeom prst="rect">
@@ -24769,7 +24769,7 @@
         </p:nvSpPr>
         <p:spPr>
           <a:xfrm>
-            <a:off x="8038947" y="1417320"/>
+            <a:off x="810844" y="1517904"/>
             <a:ext cx="3246120" cy="2331720"/>
           </a:xfrm>
           <a:prstGeom prst="roundRect">
@@ -24824,7 +24824,7 @@
         </p:nvSpPr>
         <p:spPr>
           <a:xfrm>
-            <a:off x="8038947" y="1417320"/>
+            <a:off x="810844" y="1517904"/>
             <a:ext cx="3246120" cy="128016"/>
           </a:xfrm>
           <a:prstGeom prst="roundRect">
@@ -24871,7 +24871,7 @@
         </p:nvSpPr>
         <p:spPr>
           <a:xfrm>
-            <a:off x="8267547" y="1700784"/>
+            <a:off x="6531787" y="3200400"/>
             <a:ext cx="1097280" cy="502920"/>
           </a:xfrm>
           <a:prstGeom prst="rect">
@@ -24912,7 +24912,7 @@
         </p:nvSpPr>
         <p:spPr>
           <a:xfrm>
-            <a:off x="8221827" y="1874519"/>
+            <a:off x="993724" y="1975103"/>
             <a:ext cx="2880360" cy="822960"/>
           </a:xfrm>
           <a:prstGeom prst="rect">
@@ -24932,7 +24932,7 @@
               </a:lnSpc>
             </a:pPr>
             <a:r>
-              <a:rPr lang="fa-IR" sz="1500" b="1">
+              <a:rPr lang="fa-IR" sz="1500" b="1" dirty="0">
                 <a:solidFill>
                   <a:srgbClr val="17172B"/>
                 </a:solidFill>
@@ -24953,7 +24953,7 @@
         </p:nvSpPr>
         <p:spPr>
           <a:xfrm>
-            <a:off x="8221827" y="2743200"/>
+            <a:off x="993724" y="2843784"/>
             <a:ext cx="2880360" cy="914400"/>
           </a:xfrm>
           <a:prstGeom prst="rect">
@@ -28938,7 +28938,7 @@
               </a:lnSpc>
             </a:pPr>
             <a:r>
-              <a:rPr lang="fa-IR" sz="2700" b="1">
+              <a:rPr lang="fa-IR" sz="2700" b="1" dirty="0">
                 <a:solidFill>
                   <a:srgbClr val="17172B"/>
                 </a:solidFill>
@@ -28959,7 +28959,7 @@
         </p:nvSpPr>
         <p:spPr>
           <a:xfrm>
-            <a:off x="548640" y="512064"/>
+            <a:off x="548640" y="667512"/>
             <a:ext cx="10835640" cy="310896"/>
           </a:xfrm>
           <a:prstGeom prst="rect">
@@ -28979,7 +28979,7 @@
               </a:lnSpc>
             </a:pPr>
             <a:r>
-              <a:rPr lang="fa-IR" sz="1250" b="0">
+              <a:rPr lang="fa-IR" sz="1250" b="0" dirty="0">
                 <a:solidFill>
                   <a:srgbClr val="6366F1"/>
                 </a:solidFill>
@@ -29000,7 +29000,7 @@
         </p:nvSpPr>
         <p:spPr>
           <a:xfrm>
-            <a:off x="10707624" y="859536"/>
+            <a:off x="10707624" y="905256"/>
             <a:ext cx="658368" cy="50292"/>
           </a:xfrm>
           <a:prstGeom prst="roundRect">
@@ -30878,7 +30878,7 @@
         </p:nvSpPr>
         <p:spPr>
           <a:xfrm>
-            <a:off x="548640" y="512064"/>
+            <a:off x="548640" y="667512"/>
             <a:ext cx="10835640" cy="310896"/>
           </a:xfrm>
           <a:prstGeom prst="rect">
@@ -30898,7 +30898,7 @@
               </a:lnSpc>
             </a:pPr>
             <a:r>
-              <a:rPr lang="fa-IR" sz="1250" b="0">
+              <a:rPr lang="fa-IR" sz="1250" b="0" dirty="0">
                 <a:solidFill>
                   <a:srgbClr val="6366F1"/>
                 </a:solidFill>
@@ -30919,7 +30919,7 @@
         </p:nvSpPr>
         <p:spPr>
           <a:xfrm>
-            <a:off x="10707624" y="859536"/>
+            <a:off x="10698480" y="914400"/>
             <a:ext cx="658368" cy="50292"/>
           </a:xfrm>
           <a:prstGeom prst="roundRect">
@@ -31385,7 +31385,7 @@
                     <a:p>
                       <a:pPr algn="ctr" rtl="1"/>
                       <a:r>
-                        <a:rPr lang="fa-IR" sz="1150" b="1">
+                        <a:rPr lang="fa-IR" sz="1150" b="1" dirty="0">
                           <a:solidFill>
                             <a:srgbClr val="17172B"/>
                           </a:solidFill>
@@ -32627,7 +32627,7 @@
                     <a:p>
                       <a:pPr algn="ctr" rtl="0"/>
                       <a:r>
-                        <a:rPr lang="fa-IR" sz="1250" b="1">
+                        <a:rPr lang="fa-IR" sz="1250" b="1" dirty="0">
                           <a:solidFill>
                             <a:srgbClr val="6366F1"/>
                           </a:solidFill>
@@ -32994,7 +32994,7 @@
         </p:nvSpPr>
         <p:spPr>
           <a:xfrm>
-            <a:off x="548640" y="512064"/>
+            <a:off x="548640" y="658368"/>
             <a:ext cx="10835640" cy="310896"/>
           </a:xfrm>
           <a:prstGeom prst="rect">
@@ -33014,7 +33014,7 @@
               </a:lnSpc>
             </a:pPr>
             <a:r>
-              <a:rPr lang="fa-IR" sz="1250" b="0">
+              <a:rPr lang="fa-IR" sz="1250" b="0" dirty="0">
                 <a:solidFill>
                   <a:srgbClr val="6366F1"/>
                 </a:solidFill>
@@ -33035,7 +33035,7 @@
         </p:nvSpPr>
         <p:spPr>
           <a:xfrm>
-            <a:off x="10707624" y="859536"/>
+            <a:off x="10707624" y="896112"/>
             <a:ext cx="658368" cy="50292"/>
           </a:xfrm>
           <a:prstGeom prst="roundRect">
@@ -35076,7 +35076,7 @@
         </p:nvSpPr>
         <p:spPr>
           <a:xfrm>
-            <a:off x="548640" y="512064"/>
+            <a:off x="548640" y="649224"/>
             <a:ext cx="10835640" cy="310896"/>
           </a:xfrm>
           <a:prstGeom prst="rect">
@@ -35096,7 +35096,7 @@
               </a:lnSpc>
             </a:pPr>
             <a:r>
-              <a:rPr lang="fa-IR" sz="1250" b="0">
+              <a:rPr lang="fa-IR" sz="1250" b="0" dirty="0">
                 <a:solidFill>
                   <a:srgbClr val="6366F1"/>
                 </a:solidFill>
@@ -35117,7 +35117,7 @@
         </p:nvSpPr>
         <p:spPr>
           <a:xfrm>
-            <a:off x="10707624" y="859536"/>
+            <a:off x="10707624" y="914400"/>
             <a:ext cx="658368" cy="50292"/>
           </a:xfrm>
           <a:prstGeom prst="roundRect">
